--- a/template.pptx
+++ b/template.pptx
@@ -305,65 +305,6 @@
       </p:sp>
       <p:sp>
         <p:nvSpPr>
-          <p:cNvPr id="10" name="TextBox 6">
-            <a:extLst>
-              <a:ext uri="{FF2B5EF4-FFF2-40B4-BE49-F238E27FC236}">
-                <a16:creationId xmlns:a16="http://schemas.microsoft.com/office/drawing/2014/main" id="{45B01559-5ED0-6D8D-E72A-F74AA49E68CB}"/>
-              </a:ext>
-            </a:extLst>
-          </p:cNvPr>
-          <p:cNvSpPr txBox="1"/>
-          <p:nvPr userDrawn="1"/>
-        </p:nvSpPr>
-        <p:spPr>
-          <a:xfrm>
-            <a:off x="335816" y="1319156"/>
-            <a:ext cx="6704158" cy="1484637"/>
-          </a:xfrm>
-          <a:prstGeom prst="rect">
-            <a:avLst/>
-          </a:prstGeom>
-        </p:spPr>
-        <p:txBody>
-          <a:bodyPr lIns="0" tIns="0" rIns="0" bIns="0" rtlCol="0" anchor="t">
-            <a:spAutoFit/>
-          </a:bodyPr>
-          <a:lstStyle/>
-          <a:p>
-            <a:pPr algn="ctr">
-              <a:lnSpc>
-                <a:spcPts val="13294"/>
-              </a:lnSpc>
-              <a:spcBef>
-                <a:spcPct val="0"/>
-              </a:spcBef>
-            </a:pPr>
-            <a:r>
-              <a:rPr lang="en-US" sz="8000" b="1" spc="2136" dirty="0" err="1">
-                <a:solidFill>
-                  <a:srgbClr val="FFFFFF"/>
-                </a:solidFill>
-                <a:latin typeface="HGPMinchoE" panose="02020900000000000000" pitchFamily="18" charset="-128"/>
-                <a:ea typeface="HGPMinchoE" panose="02020900000000000000" pitchFamily="18" charset="-128"/>
-                <a:cs typeface="平成明朝 Bold"/>
-                <a:sym typeface="平成明朝 Bold"/>
-              </a:rPr>
-              <a:t>SonicAI</a:t>
-            </a:r>
-            <a:endParaRPr lang="en-US" sz="8000" b="1" spc="2136" dirty="0">
-              <a:solidFill>
-                <a:srgbClr val="FFFFFF"/>
-              </a:solidFill>
-              <a:latin typeface="HGPMinchoE" panose="02020900000000000000" pitchFamily="18" charset="-128"/>
-              <a:ea typeface="HGPMinchoE" panose="02020900000000000000" pitchFamily="18" charset="-128"/>
-              <a:cs typeface="平成明朝 Bold"/>
-              <a:sym typeface="平成明朝 Bold"/>
-            </a:endParaRPr>
-          </a:p>
-        </p:txBody>
-      </p:sp>
-      <p:sp>
-        <p:nvSpPr>
           <p:cNvPr id="15" name="copmany name_text area ">
             <a:extLst>
               <a:ext uri="{FF2B5EF4-FFF2-40B4-BE49-F238E27FC236}">
@@ -470,6 +411,36 @@
           </a:p>
         </p:txBody>
       </p:sp>
+      <p:pic>
+        <p:nvPicPr>
+          <p:cNvPr id="3" name="図 2" descr="ロゴ&#10;&#10;AI 生成コンテンツは誤りを含む可能性があります。">
+            <a:extLst>
+              <a:ext uri="{FF2B5EF4-FFF2-40B4-BE49-F238E27FC236}">
+                <a16:creationId xmlns:a16="http://schemas.microsoft.com/office/drawing/2014/main" id="{0A7767E4-2E29-9041-5650-785D457BF24F}"/>
+              </a:ext>
+            </a:extLst>
+          </p:cNvPr>
+          <p:cNvPicPr>
+            <a:picLocks noChangeAspect="1"/>
+          </p:cNvPicPr>
+          <p:nvPr userDrawn="1"/>
+        </p:nvPicPr>
+        <p:blipFill>
+          <a:blip r:embed="rId3"/>
+          <a:stretch>
+            <a:fillRect/>
+          </a:stretch>
+        </p:blipFill>
+        <p:spPr>
+          <a:xfrm>
+            <a:off x="-19690" y="920701"/>
+            <a:ext cx="7772400" cy="2771553"/>
+          </a:xfrm>
+          <a:prstGeom prst="rect">
+            <a:avLst/>
+          </a:prstGeom>
+        </p:spPr>
+      </p:pic>
     </p:spTree>
     <p:extLst>
       <p:ext uri="{BB962C8B-B14F-4D97-AF65-F5344CB8AC3E}">
@@ -886,7 +857,7 @@
           <a:p>
             <a:fld id="{23364D6C-7A1C-9348-8AC7-2D8E7FEEDE81}" type="datetimeFigureOut">
               <a:rPr kumimoji="1" lang="ja-JP" altLang="en-US" smtClean="0"/>
-              <a:t>2025/12/21</a:t>
+              <a:t>2026/5/23</a:t>
             </a:fld>
             <a:endParaRPr kumimoji="1" lang="ja-JP" altLang="en-US"/>
           </a:p>
@@ -1027,7 +998,7 @@
           <a:p>
             <a:fld id="{23364D6C-7A1C-9348-8AC7-2D8E7FEEDE81}" type="datetimeFigureOut">
               <a:rPr kumimoji="1" lang="ja-JP" altLang="en-US" smtClean="0"/>
-              <a:t>2025/12/21</a:t>
+              <a:t>2026/5/23</a:t>
             </a:fld>
             <a:endParaRPr kumimoji="1" lang="ja-JP" altLang="en-US"/>
           </a:p>
@@ -1140,7 +1111,7 @@
           <a:p>
             <a:fld id="{23364D6C-7A1C-9348-8AC7-2D8E7FEEDE81}" type="datetimeFigureOut">
               <a:rPr kumimoji="1" lang="ja-JP" altLang="en-US" smtClean="0"/>
-              <a:t>2025/12/21</a:t>
+              <a:t>2026/5/23</a:t>
             </a:fld>
             <a:endParaRPr kumimoji="1" lang="ja-JP" altLang="en-US"/>
           </a:p>
@@ -1483,7 +1454,7 @@
           <a:p>
             <a:fld id="{23364D6C-7A1C-9348-8AC7-2D8E7FEEDE81}" type="datetimeFigureOut">
               <a:rPr kumimoji="1" lang="ja-JP" altLang="en-US" smtClean="0"/>
-              <a:t>2025/12/21</a:t>
+              <a:t>2026/5/23</a:t>
             </a:fld>
             <a:endParaRPr kumimoji="1" lang="ja-JP" altLang="en-US"/>
           </a:p>
@@ -1771,7 +1742,7 @@
           <a:p>
             <a:fld id="{23364D6C-7A1C-9348-8AC7-2D8E7FEEDE81}" type="datetimeFigureOut">
               <a:rPr kumimoji="1" lang="ja-JP" altLang="en-US" smtClean="0"/>
-              <a:t>2025/12/21</a:t>
+              <a:t>2026/5/23</a:t>
             </a:fld>
             <a:endParaRPr kumimoji="1" lang="ja-JP" altLang="en-US"/>
           </a:p>
@@ -2001,7 +1972,7 @@
           <a:p>
             <a:fld id="{23364D6C-7A1C-9348-8AC7-2D8E7FEEDE81}" type="datetimeFigureOut">
               <a:rPr kumimoji="1" lang="ja-JP" altLang="en-US" smtClean="0"/>
-              <a:t>2025/12/21</a:t>
+              <a:t>2026/5/23</a:t>
             </a:fld>
             <a:endParaRPr kumimoji="1" lang="ja-JP" altLang="en-US"/>
           </a:p>
@@ -2241,7 +2212,7 @@
           <a:p>
             <a:fld id="{23364D6C-7A1C-9348-8AC7-2D8E7FEEDE81}" type="datetimeFigureOut">
               <a:rPr kumimoji="1" lang="ja-JP" altLang="en-US" smtClean="0"/>
-              <a:t>2025/12/21</a:t>
+              <a:t>2026/5/23</a:t>
             </a:fld>
             <a:endParaRPr kumimoji="1" lang="ja-JP" altLang="en-US"/>
           </a:p>
@@ -2389,7 +2360,7 @@
           <a:p>
             <a:fld id="{23364D6C-7A1C-9348-8AC7-2D8E7FEEDE81}" type="datetimeFigureOut">
               <a:rPr kumimoji="1" lang="ja-JP" altLang="en-US" smtClean="0"/>
-              <a:t>2025/12/21</a:t>
+              <a:t>2026/5/23</a:t>
             </a:fld>
             <a:endParaRPr kumimoji="1" lang="ja-JP" altLang="en-US"/>
           </a:p>
@@ -2759,7 +2730,7 @@
           <a:p>
             <a:fld id="{23364D6C-7A1C-9348-8AC7-2D8E7FEEDE81}" type="datetimeFigureOut">
               <a:rPr kumimoji="1" lang="ja-JP" altLang="en-US" smtClean="0"/>
-              <a:t>2025/12/21</a:t>
+              <a:t>2026/5/23</a:t>
             </a:fld>
             <a:endParaRPr kumimoji="1" lang="ja-JP" altLang="en-US"/>
           </a:p>
@@ -3095,7 +3066,7 @@
           <a:p>
             <a:fld id="{23364D6C-7A1C-9348-8AC7-2D8E7FEEDE81}" type="datetimeFigureOut">
               <a:rPr kumimoji="1" lang="ja-JP" altLang="en-US" smtClean="0"/>
-              <a:t>2025/12/21</a:t>
+              <a:t>2026/5/23</a:t>
             </a:fld>
             <a:endParaRPr kumimoji="1" lang="ja-JP" altLang="en-US"/>
           </a:p>
@@ -3559,7 +3530,7 @@
           <a:p>
             <a:fld id="{23364D6C-7A1C-9348-8AC7-2D8E7FEEDE81}" type="datetimeFigureOut">
               <a:rPr kumimoji="1" lang="ja-JP" altLang="en-US" smtClean="0"/>
-              <a:t>2025/12/21</a:t>
+              <a:t>2026/5/23</a:t>
             </a:fld>
             <a:endParaRPr kumimoji="1" lang="ja-JP" altLang="en-US"/>
           </a:p>
@@ -3967,7 +3938,7 @@
           <a:p>
             <a:fld id="{23364D6C-7A1C-9348-8AC7-2D8E7FEEDE81}" type="datetimeFigureOut">
               <a:rPr kumimoji="1" lang="ja-JP" altLang="en-US" smtClean="0"/>
-              <a:t>2025/12/21</a:t>
+              <a:t>2026/5/23</a:t>
             </a:fld>
             <a:endParaRPr kumimoji="1" lang="ja-JP" altLang="en-US"/>
           </a:p>
@@ -4197,7 +4168,7 @@
           <a:p>
             <a:fld id="{23364D6C-7A1C-9348-8AC7-2D8E7FEEDE81}" type="datetimeFigureOut">
               <a:rPr kumimoji="1" lang="ja-JP" altLang="en-US" smtClean="0"/>
-              <a:t>2025/12/21</a:t>
+              <a:t>2026/5/23</a:t>
             </a:fld>
             <a:endParaRPr kumimoji="1" lang="ja-JP" altLang="en-US"/>
           </a:p>
@@ -4472,7 +4443,7 @@
           <a:p>
             <a:fld id="{23364D6C-7A1C-9348-8AC7-2D8E7FEEDE81}" type="datetimeFigureOut">
               <a:rPr kumimoji="1" lang="ja-JP" altLang="en-US" smtClean="0"/>
-              <a:t>2025/12/21</a:t>
+              <a:t>2026/5/23</a:t>
             </a:fld>
             <a:endParaRPr kumimoji="1" lang="ja-JP" altLang="en-US"/>
           </a:p>
@@ -4801,7 +4772,7 @@
           <a:p>
             <a:fld id="{23364D6C-7A1C-9348-8AC7-2D8E7FEEDE81}" type="datetimeFigureOut">
               <a:rPr kumimoji="1" lang="ja-JP" altLang="en-US" smtClean="0"/>
-              <a:t>2025/12/21</a:t>
+              <a:t>2026/5/23</a:t>
             </a:fld>
             <a:endParaRPr kumimoji="1" lang="ja-JP" altLang="en-US"/>
           </a:p>
@@ -5074,7 +5045,7 @@
           <a:p>
             <a:fld id="{23364D6C-7A1C-9348-8AC7-2D8E7FEEDE81}" type="datetimeFigureOut">
               <a:rPr kumimoji="1" lang="ja-JP" altLang="en-US" smtClean="0"/>
-              <a:t>2025/12/21</a:t>
+              <a:t>2026/5/23</a:t>
             </a:fld>
             <a:endParaRPr kumimoji="1" lang="ja-JP" altLang="en-US"/>
           </a:p>
@@ -5498,10 +5469,10 @@
       </p:grpSpPr>
       <p:sp>
         <p:nvSpPr>
-          <p:cNvPr id="7" name="テキスト プレースホルダー 6">
-            <a:extLst>
-              <a:ext uri="{FF2B5EF4-FFF2-40B4-BE49-F238E27FC236}">
-                <a16:creationId xmlns:a16="http://schemas.microsoft.com/office/drawing/2014/main" id="{9DBDA510-EC65-F47E-A0B2-409D06FD814E}"/>
+          <p:cNvPr id="12" name="テキスト プレースホルダー 11">
+            <a:extLst>
+              <a:ext uri="{FF2B5EF4-FFF2-40B4-BE49-F238E27FC236}">
+                <a16:creationId xmlns:a16="http://schemas.microsoft.com/office/drawing/2014/main" id="{9ADBC5E1-C5DB-939B-F49D-448DD5BC76C4}"/>
               </a:ext>
             </a:extLst>
           </p:cNvPr>
@@ -5523,10 +5494,10 @@
       </p:sp>
       <p:sp>
         <p:nvSpPr>
-          <p:cNvPr id="8" name="テキスト プレースホルダー 7">
-            <a:extLst>
-              <a:ext uri="{FF2B5EF4-FFF2-40B4-BE49-F238E27FC236}">
-                <a16:creationId xmlns:a16="http://schemas.microsoft.com/office/drawing/2014/main" id="{6BDE5212-0354-0280-E5E3-633078774DB5}"/>
+          <p:cNvPr id="13" name="テキスト プレースホルダー 12">
+            <a:extLst>
+              <a:ext uri="{FF2B5EF4-FFF2-40B4-BE49-F238E27FC236}">
+                <a16:creationId xmlns:a16="http://schemas.microsoft.com/office/drawing/2014/main" id="{203897EE-B99A-B8E3-28FF-C8A12D81C872}"/>
               </a:ext>
             </a:extLst>
           </p:cNvPr>
@@ -5548,10 +5519,10 @@
       </p:sp>
       <p:sp>
         <p:nvSpPr>
-          <p:cNvPr id="11" name="テキスト プレースホルダー 10">
-            <a:extLst>
-              <a:ext uri="{FF2B5EF4-FFF2-40B4-BE49-F238E27FC236}">
-                <a16:creationId xmlns:a16="http://schemas.microsoft.com/office/drawing/2014/main" id="{827AC675-6C10-6CD7-BB9F-D2B546178615}"/>
+          <p:cNvPr id="14" name="テキスト プレースホルダー 13">
+            <a:extLst>
+              <a:ext uri="{FF2B5EF4-FFF2-40B4-BE49-F238E27FC236}">
+                <a16:creationId xmlns:a16="http://schemas.microsoft.com/office/drawing/2014/main" id="{2A984212-DBAE-B0A5-6950-E8AF82D151E1}"/>
               </a:ext>
             </a:extLst>
           </p:cNvPr>
@@ -5564,12 +5535,10 @@
         </p:nvSpPr>
         <p:spPr/>
         <p:txBody>
-          <a:bodyPr>
-            <a:normAutofit/>
-          </a:bodyPr>
-          <a:lstStyle/>
-          <a:p>
-            <a:endParaRPr lang="ja-JP" altLang="en-US" sz="1400"/>
+          <a:bodyPr/>
+          <a:lstStyle/>
+          <a:p>
+            <a:endParaRPr lang="ja-JP" altLang="en-US"/>
           </a:p>
         </p:txBody>
       </p:sp>
